--- a/GM_VOC_POC_Summary.pptx
+++ b/GM_VOC_POC_Summary.pptx
@@ -509,7 +509,7 @@
               <a:buNone/>
             </a:pPr>
             <a:r>
-              <a:rPr lang="en-US" sz="2600" b="1" dirty="0">
+              <a:rPr lang="en-US" sz="2500" b="1" dirty="0">
                 <a:solidFill>
                   <a:srgbClr val="FFFFFF"/>
                 </a:solidFill>
@@ -648,16 +648,16 @@
                 <a:spcPct val="104000"/>
               </a:lnSpc>
               <a:spcBef>
-                <a:spcPts val="460"/>
-              </a:spcBef>
-              <a:spcAft>
-                <a:spcPts val="110"/>
+                <a:spcPts val="440"/>
+              </a:spcBef>
+              <a:spcAft>
+                <a:spcPts val="100"/>
               </a:spcAft>
               <a:buFont typeface="Arial"/>
               <a:buChar char="▪"/>
             </a:pPr>
             <a:r>
-              <a:rPr lang="en-US" sz="1600" b="1" dirty="0">
+              <a:rPr lang="en-US" sz="1550" b="1" dirty="0">
                 <a:solidFill>
                   <a:srgbClr val="2E6FF2"/>
                 </a:solidFill>
@@ -666,7 +666,7 @@
               <a:t>The task:</a:t>
             </a:r>
             <a:r>
-              <a:rPr lang="en-US" sz="1600" dirty="0">
+              <a:rPr lang="en-US" sz="1550" dirty="0">
                 <a:solidFill>
                   <a:srgbClr val="223047"/>
                 </a:solidFill>
@@ -681,16 +681,16 @@
                 <a:spcPct val="104000"/>
               </a:lnSpc>
               <a:spcBef>
-                <a:spcPts val="460"/>
-              </a:spcBef>
-              <a:spcAft>
-                <a:spcPts val="110"/>
+                <a:spcPts val="440"/>
+              </a:spcBef>
+              <a:spcAft>
+                <a:spcPts val="100"/>
               </a:spcAft>
               <a:buFont typeface="Arial"/>
               <a:buChar char="▪"/>
             </a:pPr>
             <a:r>
-              <a:rPr lang="en-US" sz="1600" b="1" dirty="0">
+              <a:rPr lang="en-US" sz="1550" b="1" dirty="0">
                 <a:solidFill>
                   <a:srgbClr val="2E6FF2"/>
                 </a:solidFill>
@@ -699,7 +699,7 @@
               <a:t>The benchmark:</a:t>
             </a:r>
             <a:r>
-              <a:rPr lang="en-US" sz="1600" dirty="0">
+              <a:rPr lang="en-US" sz="1550" dirty="0">
                 <a:solidFill>
                   <a:srgbClr val="223047"/>
                 </a:solidFill>
@@ -714,16 +714,16 @@
                 <a:spcPct val="104000"/>
               </a:lnSpc>
               <a:spcBef>
-                <a:spcPts val="460"/>
-              </a:spcBef>
-              <a:spcAft>
-                <a:spcPts val="110"/>
+                <a:spcPts val="440"/>
+              </a:spcBef>
+              <a:spcAft>
+                <a:spcPts val="100"/>
               </a:spcAft>
               <a:buFont typeface="Arial"/>
               <a:buChar char="▪"/>
             </a:pPr>
             <a:r>
-              <a:rPr lang="en-US" sz="1600" b="1" dirty="0">
+              <a:rPr lang="en-US" sz="1550" b="1" dirty="0">
                 <a:solidFill>
                   <a:srgbClr val="2E6FF2"/>
                 </a:solidFill>
@@ -732,7 +732,7 @@
               <a:t>Two approaches tested:</a:t>
             </a:r>
             <a:r>
-              <a:rPr lang="en-US" sz="1600" dirty="0">
+              <a:rPr lang="en-US" sz="1550" dirty="0">
                 <a:solidFill>
                   <a:srgbClr val="223047"/>
                 </a:solidFill>
@@ -747,16 +747,16 @@
                 <a:spcPct val="104000"/>
               </a:lnSpc>
               <a:spcBef>
-                <a:spcPts val="460"/>
-              </a:spcBef>
-              <a:spcAft>
-                <a:spcPts val="110"/>
+                <a:spcPts val="440"/>
+              </a:spcBef>
+              <a:spcAft>
+                <a:spcPts val="100"/>
               </a:spcAft>
               <a:buFont typeface="Arial"/>
               <a:buChar char="▪"/>
             </a:pPr>
             <a:r>
-              <a:rPr lang="en-US" sz="1600" b="1" dirty="0">
+              <a:rPr lang="en-US" sz="1550" b="1" dirty="0">
                 <a:solidFill>
                   <a:srgbClr val="1B2A4A"/>
                 </a:solidFill>
@@ -765,7 +765,7 @@
               <a:t>This deck:</a:t>
             </a:r>
             <a:r>
-              <a:rPr lang="en-US" sz="1600" dirty="0">
+              <a:rPr lang="en-US" sz="1550" dirty="0">
                 <a:solidFill>
                   <a:srgbClr val="223047"/>
                 </a:solidFill>
@@ -940,7 +940,7 @@
               <a:buNone/>
             </a:pPr>
             <a:r>
-              <a:rPr lang="en-US" sz="2600" b="1" dirty="0">
+              <a:rPr lang="en-US" sz="2500" b="1" dirty="0">
                 <a:solidFill>
                   <a:srgbClr val="FFFFFF"/>
                 </a:solidFill>
@@ -1658,7 +1658,7 @@
                         <a:buNone/>
                       </a:pPr>
                       <a:r>
-                        <a:rPr lang="en-US" sz="1250" b="1" dirty="0">
+                        <a:rPr lang="en-US" sz="1200" b="1" dirty="0">
                           <a:solidFill>
                             <a:srgbClr val="FFFFFF"/>
                           </a:solidFill>
@@ -1668,7 +1668,7 @@
                       </a:r>
                     </a:p>
                   </a:txBody>
-                  <a:tcPr marL="73152" marR="73152" marT="18000" marB="18000" anchor="ctr">
+                  <a:tcPr marL="63152" marR="63152" marT="16000" marB="16000" anchor="ctr">
                     <a:solidFill>
                       <a:srgbClr val="1B2A4A"/>
                     </a:solidFill>
@@ -1689,7 +1689,7 @@
                         <a:buNone/>
                       </a:pPr>
                       <a:r>
-                        <a:rPr lang="en-US" sz="1250" b="1" dirty="0">
+                        <a:rPr lang="en-US" sz="1200" b="1" dirty="0">
                           <a:solidFill>
                             <a:srgbClr val="FFFFFF"/>
                           </a:solidFill>
@@ -1699,7 +1699,7 @@
                       </a:r>
                     </a:p>
                   </a:txBody>
-                  <a:tcPr marL="73152" marR="73152" marT="18000" marB="18000" anchor="ctr">
+                  <a:tcPr marL="63152" marR="63152" marT="16000" marB="16000" anchor="ctr">
                     <a:solidFill>
                       <a:srgbClr val="1B2A4A"/>
                     </a:solidFill>
@@ -1720,7 +1720,7 @@
                         <a:buNone/>
                       </a:pPr>
                       <a:r>
-                        <a:rPr lang="en-US" sz="1250" b="1" dirty="0">
+                        <a:rPr lang="en-US" sz="1200" b="1" dirty="0">
                           <a:solidFill>
                             <a:srgbClr val="FFFFFF"/>
                           </a:solidFill>
@@ -1730,7 +1730,7 @@
                       </a:r>
                     </a:p>
                   </a:txBody>
-                  <a:tcPr marL="73152" marR="73152" marT="18000" marB="18000" anchor="ctr">
+                  <a:tcPr marL="63152" marR="63152" marT="16000" marB="16000" anchor="ctr">
                     <a:solidFill>
                       <a:srgbClr val="1B2A4A"/>
                     </a:solidFill>
@@ -1751,7 +1751,7 @@
                         <a:buNone/>
                       </a:pPr>
                       <a:r>
-                        <a:rPr lang="en-US" sz="1250" b="1" dirty="0">
+                        <a:rPr lang="en-US" sz="1200" b="1" dirty="0">
                           <a:solidFill>
                             <a:srgbClr val="FFFFFF"/>
                           </a:solidFill>
@@ -1761,7 +1761,7 @@
                       </a:r>
                     </a:p>
                   </a:txBody>
-                  <a:tcPr marL="73152" marR="73152" marT="18000" marB="18000" anchor="ctr">
+                  <a:tcPr marL="63152" marR="63152" marT="16000" marB="16000" anchor="ctr">
                     <a:solidFill>
                       <a:srgbClr val="1B2A4A"/>
                     </a:solidFill>
@@ -1784,7 +1784,7 @@
                         <a:buNone/>
                       </a:pPr>
                       <a:r>
-                        <a:rPr lang="en-US" sz="1200" b="1" dirty="0">
+                        <a:rPr lang="en-US" sz="1150" b="1" dirty="0">
                           <a:solidFill>
                             <a:srgbClr val="223047"/>
                           </a:solidFill>
@@ -1794,7 +1794,7 @@
                       </a:r>
                     </a:p>
                   </a:txBody>
-                  <a:tcPr marL="73152" marR="73152" marT="18000" marB="18000" anchor="ctr">
+                  <a:tcPr marL="63152" marR="63152" marT="16000" marB="16000" anchor="ctr">
                     <a:solidFill>
                       <a:srgbClr val="F5F7FB"/>
                     </a:solidFill>
@@ -1815,7 +1815,7 @@
                         <a:buNone/>
                       </a:pPr>
                       <a:r>
-                        <a:rPr lang="en-US" sz="1200" dirty="0">
+                        <a:rPr lang="en-US" sz="1150" dirty="0">
                           <a:solidFill>
                             <a:srgbClr val="223047"/>
                           </a:solidFill>
@@ -1825,7 +1825,7 @@
                       </a:r>
                     </a:p>
                   </a:txBody>
-                  <a:tcPr marL="73152" marR="73152" marT="18000" marB="18000" anchor="ctr">
+                  <a:tcPr marL="63152" marR="63152" marT="16000" marB="16000" anchor="ctr">
                     <a:solidFill>
                       <a:srgbClr val="F5F7FB"/>
                     </a:solidFill>
@@ -1846,7 +1846,7 @@
                         <a:buNone/>
                       </a:pPr>
                       <a:r>
-                        <a:rPr lang="en-US" sz="1200" dirty="0">
+                        <a:rPr lang="en-US" sz="1150" dirty="0">
                           <a:solidFill>
                             <a:srgbClr val="223047"/>
                           </a:solidFill>
@@ -1856,7 +1856,7 @@
                       </a:r>
                     </a:p>
                   </a:txBody>
-                  <a:tcPr marL="73152" marR="73152" marT="18000" marB="18000" anchor="ctr">
+                  <a:tcPr marL="63152" marR="63152" marT="16000" marB="16000" anchor="ctr">
                     <a:solidFill>
                       <a:srgbClr val="F5F7FB"/>
                     </a:solidFill>
@@ -1877,7 +1877,7 @@
                         <a:buNone/>
                       </a:pPr>
                       <a:r>
-                        <a:rPr lang="en-US" sz="1200" b="1" dirty="0">
+                        <a:rPr lang="en-US" sz="1150" b="1" dirty="0">
                           <a:solidFill>
                             <a:srgbClr val="2E9E5B"/>
                           </a:solidFill>
@@ -1887,7 +1887,7 @@
                       </a:r>
                     </a:p>
                   </a:txBody>
-                  <a:tcPr marL="73152" marR="73152" marT="18000" marB="18000" anchor="ctr">
+                  <a:tcPr marL="63152" marR="63152" marT="16000" marB="16000" anchor="ctr">
                     <a:solidFill>
                       <a:srgbClr val="F5F7FB"/>
                     </a:solidFill>
@@ -1910,7 +1910,7 @@
                         <a:buNone/>
                       </a:pPr>
                       <a:r>
-                        <a:rPr lang="en-US" sz="1200" b="1" dirty="0">
+                        <a:rPr lang="en-US" sz="1150" b="1" dirty="0">
                           <a:solidFill>
                             <a:srgbClr val="223047"/>
                           </a:solidFill>
@@ -1920,7 +1920,7 @@
                       </a:r>
                     </a:p>
                   </a:txBody>
-                  <a:tcPr marL="73152" marR="73152" marT="18000" marB="18000" anchor="ctr">
+                  <a:tcPr marL="63152" marR="63152" marT="16000" marB="16000" anchor="ctr">
                     <a:solidFill>
                       <a:srgbClr val="FFFFFF"/>
                     </a:solidFill>
@@ -1941,7 +1941,7 @@
                         <a:buNone/>
                       </a:pPr>
                       <a:r>
-                        <a:rPr lang="en-US" sz="1200" dirty="0">
+                        <a:rPr lang="en-US" sz="1150" dirty="0">
                           <a:solidFill>
                             <a:srgbClr val="223047"/>
                           </a:solidFill>
@@ -1951,7 +1951,7 @@
                       </a:r>
                     </a:p>
                   </a:txBody>
-                  <a:tcPr marL="73152" marR="73152" marT="18000" marB="18000" anchor="ctr">
+                  <a:tcPr marL="63152" marR="63152" marT="16000" marB="16000" anchor="ctr">
                     <a:solidFill>
                       <a:srgbClr val="FFFFFF"/>
                     </a:solidFill>
@@ -1972,7 +1972,7 @@
                         <a:buNone/>
                       </a:pPr>
                       <a:r>
-                        <a:rPr lang="en-US" sz="1200" dirty="0">
+                        <a:rPr lang="en-US" sz="1150" dirty="0">
                           <a:solidFill>
                             <a:srgbClr val="223047"/>
                           </a:solidFill>
@@ -1982,7 +1982,7 @@
                       </a:r>
                     </a:p>
                   </a:txBody>
-                  <a:tcPr marL="73152" marR="73152" marT="18000" marB="18000" anchor="ctr">
+                  <a:tcPr marL="63152" marR="63152" marT="16000" marB="16000" anchor="ctr">
                     <a:solidFill>
                       <a:srgbClr val="FFFFFF"/>
                     </a:solidFill>
@@ -2003,7 +2003,7 @@
                         <a:buNone/>
                       </a:pPr>
                       <a:r>
-                        <a:rPr lang="en-US" sz="1200" b="1" dirty="0">
+                        <a:rPr lang="en-US" sz="1150" b="1" dirty="0">
                           <a:solidFill>
                             <a:srgbClr val="2E9E5B"/>
                           </a:solidFill>
@@ -2013,7 +2013,7 @@
                       </a:r>
                     </a:p>
                   </a:txBody>
-                  <a:tcPr marL="73152" marR="73152" marT="18000" marB="18000" anchor="ctr">
+                  <a:tcPr marL="63152" marR="63152" marT="16000" marB="16000" anchor="ctr">
                     <a:solidFill>
                       <a:srgbClr val="FFFFFF"/>
                     </a:solidFill>
@@ -2036,7 +2036,7 @@
                         <a:buNone/>
                       </a:pPr>
                       <a:r>
-                        <a:rPr lang="en-US" sz="1200" b="1" dirty="0">
+                        <a:rPr lang="en-US" sz="1150" b="1" dirty="0">
                           <a:solidFill>
                             <a:srgbClr val="223047"/>
                           </a:solidFill>
@@ -2046,7 +2046,7 @@
                       </a:r>
                     </a:p>
                   </a:txBody>
-                  <a:tcPr marL="73152" marR="73152" marT="18000" marB="18000" anchor="ctr">
+                  <a:tcPr marL="63152" marR="63152" marT="16000" marB="16000" anchor="ctr">
                     <a:solidFill>
                       <a:srgbClr val="F5F7FB"/>
                     </a:solidFill>
@@ -2067,7 +2067,7 @@
                         <a:buNone/>
                       </a:pPr>
                       <a:r>
-                        <a:rPr lang="en-US" sz="1200" dirty="0">
+                        <a:rPr lang="en-US" sz="1150" dirty="0">
                           <a:solidFill>
                             <a:srgbClr val="223047"/>
                           </a:solidFill>
@@ -2077,7 +2077,7 @@
                       </a:r>
                     </a:p>
                   </a:txBody>
-                  <a:tcPr marL="73152" marR="73152" marT="18000" marB="18000" anchor="ctr">
+                  <a:tcPr marL="63152" marR="63152" marT="16000" marB="16000" anchor="ctr">
                     <a:solidFill>
                       <a:srgbClr val="F5F7FB"/>
                     </a:solidFill>
@@ -2098,7 +2098,7 @@
                         <a:buNone/>
                       </a:pPr>
                       <a:r>
-                        <a:rPr lang="en-US" sz="1200" dirty="0">
+                        <a:rPr lang="en-US" sz="1150" dirty="0">
                           <a:solidFill>
                             <a:srgbClr val="223047"/>
                           </a:solidFill>
@@ -2108,7 +2108,7 @@
                       </a:r>
                     </a:p>
                   </a:txBody>
-                  <a:tcPr marL="73152" marR="73152" marT="18000" marB="18000" anchor="ctr">
+                  <a:tcPr marL="63152" marR="63152" marT="16000" marB="16000" anchor="ctr">
                     <a:solidFill>
                       <a:srgbClr val="F5F7FB"/>
                     </a:solidFill>
@@ -2129,7 +2129,7 @@
                         <a:buNone/>
                       </a:pPr>
                       <a:r>
-                        <a:rPr lang="en-US" sz="1200" b="1" dirty="0">
+                        <a:rPr lang="en-US" sz="1150" b="1" dirty="0">
                           <a:solidFill>
                             <a:srgbClr val="2E9E5B"/>
                           </a:solidFill>
@@ -2139,7 +2139,7 @@
                       </a:r>
                     </a:p>
                   </a:txBody>
-                  <a:tcPr marL="73152" marR="73152" marT="18000" marB="18000" anchor="ctr">
+                  <a:tcPr marL="63152" marR="63152" marT="16000" marB="16000" anchor="ctr">
                     <a:solidFill>
                       <a:srgbClr val="F5F7FB"/>
                     </a:solidFill>
@@ -2314,7 +2314,7 @@
               <a:buNone/>
             </a:pPr>
             <a:r>
-              <a:rPr lang="en-US" sz="2600" b="1" dirty="0">
+              <a:rPr lang="en-US" sz="2500" b="1" dirty="0">
                 <a:solidFill>
                   <a:srgbClr val="FFFFFF"/>
                 </a:solidFill>
@@ -2951,16 +2951,16 @@
                 <a:spcPct val="104000"/>
               </a:lnSpc>
               <a:spcBef>
-                <a:spcPts val="110"/>
-              </a:spcBef>
-              <a:spcAft>
-                <a:spcPts val="110"/>
+                <a:spcPts val="100"/>
+              </a:spcBef>
+              <a:spcAft>
+                <a:spcPts val="100"/>
               </a:spcAft>
               <a:buFont typeface="Arial"/>
               <a:buChar char="▪"/>
             </a:pPr>
             <a:r>
-              <a:rPr lang="en-US" sz="1600" b="1" dirty="0">
+              <a:rPr lang="en-US" sz="1550" b="1" dirty="0">
                 <a:solidFill>
                   <a:srgbClr val="2E6FF2"/>
                 </a:solidFill>
@@ -2969,7 +2969,7 @@
               <a:t>Cause:</a:t>
             </a:r>
             <a:r>
-              <a:rPr lang="en-US" sz="1600" dirty="0">
+              <a:rPr lang="en-US" sz="1550" dirty="0">
                 <a:solidFill>
                   <a:srgbClr val="223047"/>
                 </a:solidFill>
@@ -2984,16 +2984,16 @@
                 <a:spcPct val="104000"/>
               </a:lnSpc>
               <a:spcBef>
-                <a:spcPts val="110"/>
-              </a:spcBef>
-              <a:spcAft>
-                <a:spcPts val="110"/>
+                <a:spcPts val="100"/>
+              </a:spcBef>
+              <a:spcAft>
+                <a:spcPts val="100"/>
               </a:spcAft>
               <a:buFont typeface="Arial"/>
               <a:buChar char="▪"/>
             </a:pPr>
             <a:r>
-              <a:rPr lang="en-US" sz="1600" b="1" dirty="0">
+              <a:rPr lang="en-US" sz="1550" b="1" dirty="0">
                 <a:solidFill>
                   <a:srgbClr val="2E9E5B"/>
                 </a:solidFill>
@@ -3002,7 +3002,7 @@
               <a:t>Fix:</a:t>
             </a:r>
             <a:r>
-              <a:rPr lang="en-US" sz="1600" dirty="0">
+              <a:rPr lang="en-US" sz="1550" dirty="0">
                 <a:solidFill>
                   <a:srgbClr val="223047"/>
                 </a:solidFill>
@@ -3177,7 +3177,7 @@
               <a:buNone/>
             </a:pPr>
             <a:r>
-              <a:rPr lang="en-US" sz="2600" b="1" dirty="0">
+              <a:rPr lang="en-US" sz="2500" b="1" dirty="0">
                 <a:solidFill>
                   <a:srgbClr val="FFFFFF"/>
                 </a:solidFill>
@@ -3814,16 +3814,16 @@
                 <a:spcPct val="104000"/>
               </a:lnSpc>
               <a:spcBef>
-                <a:spcPts val="110"/>
-              </a:spcBef>
-              <a:spcAft>
-                <a:spcPts val="110"/>
+                <a:spcPts val="100"/>
+              </a:spcBef>
+              <a:spcAft>
+                <a:spcPts val="100"/>
               </a:spcAft>
               <a:buFont typeface="Arial"/>
               <a:buChar char="▪"/>
             </a:pPr>
             <a:r>
-              <a:rPr lang="en-US" sz="1600" b="1" dirty="0">
+              <a:rPr lang="en-US" sz="1550" b="1" dirty="0">
                 <a:solidFill>
                   <a:srgbClr val="2E6FF2"/>
                 </a:solidFill>
@@ -3832,7 +3832,7 @@
               <a:t>Why our numbers looked ~30% high:</a:t>
             </a:r>
             <a:r>
-              <a:rPr lang="en-US" sz="1600" dirty="0">
+              <a:rPr lang="en-US" sz="1550" dirty="0">
                 <a:solidFill>
                   <a:srgbClr val="223047"/>
                 </a:solidFill>
@@ -3847,16 +3847,16 @@
                 <a:spcPct val="104000"/>
               </a:lnSpc>
               <a:spcBef>
-                <a:spcPts val="110"/>
-              </a:spcBef>
-              <a:spcAft>
-                <a:spcPts val="110"/>
+                <a:spcPts val="100"/>
+              </a:spcBef>
+              <a:spcAft>
+                <a:spcPts val="100"/>
               </a:spcAft>
               <a:buFont typeface="Arial"/>
               <a:buChar char="▪"/>
             </a:pPr>
             <a:r>
-              <a:rPr lang="en-US" sz="1600" b="1" dirty="0">
+              <a:rPr lang="en-US" sz="1550" b="1" dirty="0">
                 <a:solidFill>
                   <a:srgbClr val="2E9E5B"/>
                 </a:solidFill>
@@ -3865,7 +3865,7 @@
               <a:t>One-line fix:</a:t>
             </a:r>
             <a:r>
-              <a:rPr lang="en-US" sz="1600" dirty="0">
+              <a:rPr lang="en-US" sz="1550" dirty="0">
                 <a:solidFill>
                   <a:srgbClr val="223047"/>
                 </a:solidFill>
@@ -4040,7 +4040,7 @@
               <a:buNone/>
             </a:pPr>
             <a:r>
-              <a:rPr lang="en-US" sz="2600" b="1" dirty="0">
+              <a:rPr lang="en-US" sz="2500" b="1" dirty="0">
                 <a:solidFill>
                   <a:srgbClr val="FFFFFF"/>
                 </a:solidFill>
@@ -4331,16 +4331,16 @@
                 <a:spcPct val="104000"/>
               </a:lnSpc>
               <a:spcBef>
-                <a:spcPts val="460"/>
-              </a:spcBef>
-              <a:spcAft>
-                <a:spcPts val="110"/>
+                <a:spcPts val="440"/>
+              </a:spcBef>
+              <a:spcAft>
+                <a:spcPts val="100"/>
               </a:spcAft>
               <a:buFont typeface="Arial"/>
               <a:buChar char="▪"/>
             </a:pPr>
             <a:r>
-              <a:rPr lang="en-US" sz="1600" b="1" dirty="0">
+              <a:rPr lang="en-US" sz="1550" b="1" dirty="0">
                 <a:solidFill>
                   <a:srgbClr val="223047"/>
                 </a:solidFill>
@@ -4349,7 +4349,7 @@
               <a:t>Model is the biggest lever:</a:t>
             </a:r>
             <a:r>
-              <a:rPr lang="en-US" sz="1600" dirty="0">
+              <a:rPr lang="en-US" sz="1550" dirty="0">
                 <a:solidFill>
                   <a:srgbClr val="223047"/>
                 </a:solidFill>
@@ -4364,16 +4364,16 @@
                 <a:spcPct val="104000"/>
               </a:lnSpc>
               <a:spcBef>
-                <a:spcPts val="460"/>
-              </a:spcBef>
-              <a:spcAft>
-                <a:spcPts val="110"/>
+                <a:spcPts val="440"/>
+              </a:spcBef>
+              <a:spcAft>
+                <a:spcPts val="100"/>
               </a:spcAft>
               <a:buFont typeface="Arial"/>
               <a:buChar char="▪"/>
             </a:pPr>
             <a:r>
-              <a:rPr lang="en-US" sz="1600" b="1" dirty="0">
+              <a:rPr lang="en-US" sz="1550" b="1" dirty="0">
                 <a:solidFill>
                   <a:srgbClr val="2E6FF2"/>
                 </a:solidFill>
@@ -4382,7 +4382,7 @@
               <a:t>Prompt tightening:</a:t>
             </a:r>
             <a:r>
-              <a:rPr lang="en-US" sz="1600" dirty="0">
+              <a:rPr lang="en-US" sz="1550" dirty="0">
                 <a:solidFill>
                   <a:srgbClr val="223047"/>
                 </a:solidFill>
@@ -4397,16 +4397,16 @@
                 <a:spcPct val="104000"/>
               </a:lnSpc>
               <a:spcBef>
-                <a:spcPts val="460"/>
-              </a:spcBef>
-              <a:spcAft>
-                <a:spcPts val="110"/>
+                <a:spcPts val="440"/>
+              </a:spcBef>
+              <a:spcAft>
+                <a:spcPts val="100"/>
               </a:spcAft>
               <a:buFont typeface="Arial"/>
               <a:buChar char="▪"/>
             </a:pPr>
             <a:r>
-              <a:rPr lang="en-US" sz="1600" b="1" dirty="0">
+              <a:rPr lang="en-US" sz="1550" b="1" dirty="0">
                 <a:solidFill>
                   <a:srgbClr val="1B2A4A"/>
                 </a:solidFill>
@@ -4415,7 +4415,7 @@
               <a:t>So AI is viable:</a:t>
             </a:r>
             <a:r>
-              <a:rPr lang="en-US" sz="1600" dirty="0">
+              <a:rPr lang="en-US" sz="1550" dirty="0">
                 <a:solidFill>
                   <a:srgbClr val="223047"/>
                 </a:solidFill>
@@ -4590,7 +4590,7 @@
               <a:buNone/>
             </a:pPr>
             <a:r>
-              <a:rPr lang="en-US" sz="2600" b="1" dirty="0">
+              <a:rPr lang="en-US" sz="2500" b="1" dirty="0">
                 <a:solidFill>
                   <a:srgbClr val="FFFFFF"/>
                 </a:solidFill>
@@ -5077,16 +5077,16 @@
                 <a:spcPct val="104000"/>
               </a:lnSpc>
               <a:spcBef>
-                <a:spcPts val="110"/>
-              </a:spcBef>
-              <a:spcAft>
-                <a:spcPts val="110"/>
+                <a:spcPts val="100"/>
+              </a:spcBef>
+              <a:spcAft>
+                <a:spcPts val="100"/>
               </a:spcAft>
               <a:buFont typeface="Arial"/>
               <a:buChar char="▪"/>
             </a:pPr>
             <a:r>
-              <a:rPr lang="en-US" sz="1600" b="1" dirty="0">
+              <a:rPr lang="en-US" sz="1550" b="1" dirty="0">
                 <a:solidFill>
                   <a:srgbClr val="2E6FF2"/>
                 </a:solidFill>
@@ -5095,7 +5095,7 @@
               <a:t>The trade-off:</a:t>
             </a:r>
             <a:r>
-              <a:rPr lang="en-US" sz="1600" dirty="0">
+              <a:rPr lang="en-US" sz="1550" dirty="0">
                 <a:solidFill>
                   <a:srgbClr val="223047"/>
                 </a:solidFill>
@@ -5110,16 +5110,16 @@
                 <a:spcPct val="104000"/>
               </a:lnSpc>
               <a:spcBef>
-                <a:spcPts val="110"/>
-              </a:spcBef>
-              <a:spcAft>
-                <a:spcPts val="110"/>
+                <a:spcPts val="100"/>
+              </a:spcBef>
+              <a:spcAft>
+                <a:spcPts val="100"/>
               </a:spcAft>
               <a:buFont typeface="Arial"/>
               <a:buChar char="▪"/>
             </a:pPr>
             <a:r>
-              <a:rPr lang="en-US" sz="1600" b="1" dirty="0">
+              <a:rPr lang="en-US" sz="1550" b="1" dirty="0">
                 <a:solidFill>
                   <a:srgbClr val="1B2A4A"/>
                 </a:solidFill>
@@ -5128,7 +5128,7 @@
               <a:t>The options:</a:t>
             </a:r>
             <a:r>
-              <a:rPr lang="en-US" sz="1600" dirty="0">
+              <a:rPr lang="en-US" sz="1550" dirty="0">
                 <a:solidFill>
                   <a:srgbClr val="223047"/>
                 </a:solidFill>
@@ -5303,7 +5303,7 @@
               <a:buNone/>
             </a:pPr>
             <a:r>
-              <a:rPr lang="en-US" sz="2600" b="1" dirty="0">
+              <a:rPr lang="en-US" sz="2500" b="1" dirty="0">
                 <a:solidFill>
                   <a:srgbClr val="FFFFFF"/>
                 </a:solidFill>
@@ -5490,16 +5490,16 @@
                 <a:spcPct val="104000"/>
               </a:lnSpc>
               <a:spcBef>
-                <a:spcPts val="110"/>
-              </a:spcBef>
-              <a:spcAft>
-                <a:spcPts val="110"/>
+                <a:spcPts val="100"/>
+              </a:spcBef>
+              <a:spcAft>
+                <a:spcPts val="100"/>
               </a:spcAft>
               <a:buFont typeface="Arial"/>
               <a:buChar char="▪"/>
             </a:pPr>
             <a:r>
-              <a:rPr lang="en-US" sz="1600" b="1" dirty="0">
+              <a:rPr lang="en-US" sz="1550" b="1" dirty="0">
                 <a:solidFill>
                   <a:srgbClr val="2E6FF2"/>
                 </a:solidFill>
@@ -5508,7 +5508,7 @@
               <a:t>Rule engine</a:t>
             </a:r>
             <a:r>
-              <a:rPr lang="en-US" sz="1600" dirty="0">
+              <a:rPr lang="en-US" sz="1550" dirty="0">
                 <a:solidFill>
                   <a:srgbClr val="223047"/>
                 </a:solidFill>
@@ -5523,16 +5523,16 @@
                 <a:spcPct val="104000"/>
               </a:lnSpc>
               <a:spcBef>
-                <a:spcPts val="110"/>
-              </a:spcBef>
-              <a:spcAft>
-                <a:spcPts val="110"/>
+                <a:spcPts val="100"/>
+              </a:spcBef>
+              <a:spcAft>
+                <a:spcPts val="100"/>
               </a:spcAft>
               <a:buFont typeface="Arial"/>
               <a:buChar char="▪"/>
             </a:pPr>
             <a:r>
-              <a:rPr lang="en-US" sz="1600" b="1" dirty="0">
+              <a:rPr lang="en-US" sz="1550" b="1" dirty="0">
                 <a:solidFill>
                   <a:srgbClr val="2E6FF2"/>
                 </a:solidFill>
@@ -5541,7 +5541,7 @@
               <a:t>Redeem + grain</a:t>
             </a:r>
             <a:r>
-              <a:rPr lang="en-US" sz="1600" dirty="0">
+              <a:rPr lang="en-US" sz="1550" dirty="0">
                 <a:solidFill>
                   <a:srgbClr val="223047"/>
                 </a:solidFill>
@@ -5556,16 +5556,16 @@
                 <a:spcPct val="104000"/>
               </a:lnSpc>
               <a:spcBef>
-                <a:spcPts val="110"/>
-              </a:spcBef>
-              <a:spcAft>
-                <a:spcPts val="110"/>
+                <a:spcPts val="100"/>
+              </a:spcBef>
+              <a:spcAft>
+                <a:spcPts val="100"/>
               </a:spcAft>
               <a:buFont typeface="Arial"/>
               <a:buChar char="▪"/>
             </a:pPr>
             <a:r>
-              <a:rPr lang="en-US" sz="1600" b="1" dirty="0">
+              <a:rPr lang="en-US" sz="1550" b="1" dirty="0">
                 <a:solidFill>
                   <a:srgbClr val="2E6FF2"/>
                 </a:solidFill>
@@ -5574,7 +5574,7 @@
               <a:t>AI with Sonnet 4.6</a:t>
             </a:r>
             <a:r>
-              <a:rPr lang="en-US" sz="1600" dirty="0">
+              <a:rPr lang="en-US" sz="1550" dirty="0">
                 <a:solidFill>
                   <a:srgbClr val="223047"/>
                 </a:solidFill>
@@ -5589,16 +5589,16 @@
                 <a:spcPct val="104000"/>
               </a:lnSpc>
               <a:spcBef>
-                <a:spcPts val="110"/>
-              </a:spcBef>
-              <a:spcAft>
-                <a:spcPts val="110"/>
+                <a:spcPts val="100"/>
+              </a:spcBef>
+              <a:spcAft>
+                <a:spcPts val="100"/>
               </a:spcAft>
               <a:buFont typeface="Arial"/>
               <a:buChar char="▪"/>
             </a:pPr>
             <a:r>
-              <a:rPr lang="en-US" sz="1600" b="1" dirty="0">
+              <a:rPr lang="en-US" sz="1550" b="1" dirty="0">
                 <a:solidFill>
                   <a:srgbClr val="2E6FF2"/>
                 </a:solidFill>
@@ -5607,7 +5607,7 @@
               <a:t>Batch SQL inference</a:t>
             </a:r>
             <a:r>
-              <a:rPr lang="en-US" sz="1600" dirty="0">
+              <a:rPr lang="en-US" sz="1550" dirty="0">
                 <a:solidFill>
                   <a:srgbClr val="223047"/>
                 </a:solidFill>
@@ -5698,16 +5698,16 @@
                 <a:spcPct val="104000"/>
               </a:lnSpc>
               <a:spcBef>
-                <a:spcPts val="110"/>
-              </a:spcBef>
-              <a:spcAft>
-                <a:spcPts val="110"/>
+                <a:spcPts val="100"/>
+              </a:spcBef>
+              <a:spcAft>
+                <a:spcPts val="100"/>
               </a:spcAft>
               <a:buFont typeface="Arial"/>
               <a:buChar char="▪"/>
             </a:pPr>
             <a:r>
-              <a:rPr lang="en-US" sz="1600" b="1" dirty="0">
+              <a:rPr lang="en-US" sz="1550" b="1" dirty="0">
                 <a:solidFill>
                   <a:srgbClr val="2E6FF2"/>
                 </a:solidFill>
@@ -5716,13 +5716,13 @@
               <a:t>Built-in ai_classify</a:t>
             </a:r>
             <a:r>
-              <a:rPr lang="en-US" sz="1600" dirty="0">
+              <a:rPr lang="en-US" sz="1550" dirty="0">
                 <a:solidFill>
                   <a:srgbClr val="223047"/>
                 </a:solidFill>
                 <a:latin typeface="Calibri"/>
               </a:rPr>
-              <a:t> fast but too weak &amp; single-label.</a:t>
+              <a:t> fast, multi-label (v2.1), but fixed model.</a:t>
             </a:r>
           </a:p>
           <a:p>
@@ -5731,16 +5731,16 @@
                 <a:spcPct val="104000"/>
               </a:lnSpc>
               <a:spcBef>
-                <a:spcPts val="110"/>
-              </a:spcBef>
-              <a:spcAft>
-                <a:spcPts val="110"/>
+                <a:spcPts val="100"/>
+              </a:spcBef>
+              <a:spcAft>
+                <a:spcPts val="100"/>
               </a:spcAft>
               <a:buFont typeface="Arial"/>
               <a:buChar char="▪"/>
             </a:pPr>
             <a:r>
-              <a:rPr lang="en-US" sz="1600" b="1" dirty="0">
+              <a:rPr lang="en-US" sz="1550" b="1" dirty="0">
                 <a:solidFill>
                   <a:srgbClr val="2E6FF2"/>
                 </a:solidFill>
@@ -5749,7 +5749,7 @@
               <a:t>Small models</a:t>
             </a:r>
             <a:r>
-              <a:rPr lang="en-US" sz="1600" dirty="0">
+              <a:rPr lang="en-US" sz="1550" dirty="0">
                 <a:solidFill>
                   <a:srgbClr val="223047"/>
                 </a:solidFill>
@@ -5764,16 +5764,16 @@
                 <a:spcPct val="104000"/>
               </a:lnSpc>
               <a:spcBef>
-                <a:spcPts val="110"/>
-              </a:spcBef>
-              <a:spcAft>
-                <a:spcPts val="110"/>
+                <a:spcPts val="100"/>
+              </a:spcBef>
+              <a:spcAft>
+                <a:spcPts val="100"/>
               </a:spcAft>
               <a:buFont typeface="Arial"/>
               <a:buChar char="▪"/>
             </a:pPr>
             <a:r>
-              <a:rPr lang="en-US" sz="1600" b="1" dirty="0">
+              <a:rPr lang="en-US" sz="1550" b="1" dirty="0">
                 <a:solidFill>
                   <a:srgbClr val="2E6FF2"/>
                 </a:solidFill>
@@ -5782,7 +5782,7 @@
               <a:t>Pay-per-token limits</a:t>
             </a:r>
             <a:r>
-              <a:rPr lang="en-US" sz="1600" dirty="0">
+              <a:rPr lang="en-US" sz="1550" dirty="0">
                 <a:solidFill>
                   <a:srgbClr val="223047"/>
                 </a:solidFill>
@@ -5797,16 +5797,16 @@
                 <a:spcPct val="104000"/>
               </a:lnSpc>
               <a:spcBef>
-                <a:spcPts val="110"/>
-              </a:spcBef>
-              <a:spcAft>
-                <a:spcPts val="110"/>
+                <a:spcPts val="100"/>
+              </a:spcBef>
+              <a:spcAft>
+                <a:spcPts val="100"/>
               </a:spcAft>
               <a:buFont typeface="Arial"/>
               <a:buChar char="▪"/>
             </a:pPr>
             <a:r>
-              <a:rPr lang="en-US" sz="1600" b="1" dirty="0">
+              <a:rPr lang="en-US" sz="1550" b="1" dirty="0">
                 <a:solidFill>
                   <a:srgbClr val="2E6FF2"/>
                 </a:solidFill>
@@ -5815,7 +5815,7 @@
               <a:t>Scaling AI</a:t>
             </a:r>
             <a:r>
-              <a:rPr lang="en-US" sz="1600" dirty="0">
+              <a:rPr lang="en-US" sz="1550" dirty="0">
                 <a:solidFill>
                   <a:srgbClr val="223047"/>
                 </a:solidFill>
@@ -5990,7 +5990,7 @@
               <a:buNone/>
             </a:pPr>
             <a:r>
-              <a:rPr lang="en-US" sz="2600" b="1" dirty="0">
+              <a:rPr lang="en-US" sz="2500" b="1" dirty="0">
                 <a:solidFill>
                   <a:srgbClr val="FFFFFF"/>
                 </a:solidFill>
@@ -6129,16 +6129,16 @@
                 <a:spcPct val="104000"/>
               </a:lnSpc>
               <a:spcBef>
-                <a:spcPts val="460"/>
-              </a:spcBef>
-              <a:spcAft>
-                <a:spcPts val="110"/>
+                <a:spcPts val="440"/>
+              </a:spcBef>
+              <a:spcAft>
+                <a:spcPts val="100"/>
               </a:spcAft>
               <a:buFont typeface="Arial"/>
               <a:buChar char="▪"/>
             </a:pPr>
             <a:r>
-              <a:rPr lang="en-US" sz="1600" b="1" dirty="0">
+              <a:rPr lang="en-US" sz="1550" b="1" dirty="0">
                 <a:solidFill>
                   <a:srgbClr val="2E9E5B"/>
                 </a:solidFill>
@@ -6147,7 +6147,7 @@
               <a:t>Ship the rule engine:</a:t>
             </a:r>
             <a:r>
-              <a:rPr lang="en-US" sz="1600" dirty="0">
+              <a:rPr lang="en-US" sz="1550" dirty="0">
                 <a:solidFill>
                   <a:srgbClr val="223047"/>
                 </a:solidFill>
@@ -6162,16 +6162,16 @@
                 <a:spcPct val="104000"/>
               </a:lnSpc>
               <a:spcBef>
-                <a:spcPts val="460"/>
-              </a:spcBef>
-              <a:spcAft>
-                <a:spcPts val="110"/>
+                <a:spcPts val="440"/>
+              </a:spcBef>
+              <a:spcAft>
+                <a:spcPts val="100"/>
               </a:spcAft>
               <a:buFont typeface="Arial"/>
               <a:buChar char="▪"/>
             </a:pPr>
             <a:r>
-              <a:rPr lang="en-US" sz="1600" b="1" dirty="0">
+              <a:rPr lang="en-US" sz="1550" b="1" dirty="0">
                 <a:solidFill>
                   <a:srgbClr val="2E6FF2"/>
                 </a:solidFill>
@@ -6180,7 +6180,7 @@
               <a:t>Scale AI with better throughput:</a:t>
             </a:r>
             <a:r>
-              <a:rPr lang="en-US" sz="1600" dirty="0">
+              <a:rPr lang="en-US" sz="1550" dirty="0">
                 <a:solidFill>
                   <a:srgbClr val="223047"/>
                 </a:solidFill>
@@ -6195,16 +6195,16 @@
                 <a:spcPct val="104000"/>
               </a:lnSpc>
               <a:spcBef>
-                <a:spcPts val="460"/>
-              </a:spcBef>
-              <a:spcAft>
-                <a:spcPts val="110"/>
+                <a:spcPts val="440"/>
+              </a:spcBef>
+              <a:spcAft>
+                <a:spcPts val="100"/>
               </a:spcAft>
               <a:buFont typeface="Arial"/>
               <a:buChar char="▪"/>
             </a:pPr>
             <a:r>
-              <a:rPr lang="en-US" sz="1600" b="1" dirty="0">
+              <a:rPr lang="en-US" sz="1550" b="1" dirty="0">
                 <a:solidFill>
                   <a:srgbClr val="2E6FF2"/>
                 </a:solidFill>
@@ -6213,7 +6213,7 @@
               <a:t>Use AI as a complement:</a:t>
             </a:r>
             <a:r>
-              <a:rPr lang="en-US" sz="1600" dirty="0">
+              <a:rPr lang="en-US" sz="1550" dirty="0">
                 <a:solidFill>
                   <a:srgbClr val="223047"/>
                 </a:solidFill>
@@ -6228,16 +6228,16 @@
                 <a:spcPct val="104000"/>
               </a:lnSpc>
               <a:spcBef>
-                <a:spcPts val="460"/>
-              </a:spcBef>
-              <a:spcAft>
-                <a:spcPts val="110"/>
+                <a:spcPts val="440"/>
+              </a:spcBef>
+              <a:spcAft>
+                <a:spcPts val="100"/>
               </a:spcAft>
               <a:buFont typeface="Arial"/>
               <a:buChar char="▪"/>
             </a:pPr>
             <a:r>
-              <a:rPr lang="en-US" sz="1600" b="1" dirty="0">
+              <a:rPr lang="en-US" sz="1550" b="1" dirty="0">
                 <a:solidFill>
                   <a:srgbClr val="1B2A4A"/>
                 </a:solidFill>
@@ -6246,7 +6246,7 @@
               <a:t>Next:</a:t>
             </a:r>
             <a:r>
-              <a:rPr lang="en-US" sz="1600" dirty="0">
+              <a:rPr lang="en-US" sz="1550" dirty="0">
                 <a:solidFill>
                   <a:srgbClr val="223047"/>
                 </a:solidFill>
